--- a/exports/schemas-esol.pptx
+++ b/exports/schemas-esol.pptx
@@ -9998,7 +9998,7 @@
             <a:avLst/>
           </a:prstGeom>
           <a:solidFill>
-            <a:srgbClr val="586330"/>
+            <a:srgbClr val="264E54"/>
           </a:solidFill>
           <a:ln>
             <a:noFill/>
@@ -10028,7 +10028,327 @@
             <a:avLst/>
           </a:prstGeom>
           <a:solidFill>
-            <a:srgbClr val="D8E6A6"/>
+            <a:srgbClr val="C9E2E4"/>
+          </a:solidFill>
+          <a:ln w="15875">
+            <a:solidFill>
+              <a:srgbClr val="264E54"/>
+            </a:solidFill>
+          </a:ln>
+          <a:effectLst/>
+        </p:spPr>
+        <p:txBody>
+          <a:bodyPr rtlCol="0" anchor="ctr" wrap="square" lIns="18288" rIns="18288" tIns="18288" bIns="18288">
+            <a:noAutofit/>
+          </a:bodyPr>
+          <a:lstStyle/>
+          <a:p>
+            <a:pPr algn="ctr">
+              <a:lnSpc>
+                <a:spcPct val="95000"/>
+              </a:lnSpc>
+              <a:spcAft>
+                <a:spcPts val="0"/>
+              </a:spcAft>
+            </a:pPr>
+            <a:r>
+              <a:rPr sz="850" b="1" i="0">
+                <a:solidFill>
+                  <a:srgbClr val="264E54"/>
+                </a:solidFill>
+                <a:latin typeface="Outfit"/>
+              </a:rPr>
+              <a:t>Secteur privé</a:t>
+            </a:r>
+          </a:p>
+        </p:txBody>
+      </p:sp>
+      <p:sp>
+        <p:nvSpPr>
+          <p:cNvPr id="12" name="Isosceles Triangle 11"/>
+          <p:cNvSpPr/>
+          <p:nvPr/>
+        </p:nvSpPr>
+        <p:spPr>
+          <a:xfrm>
+            <a:off x="6160752" y="932688"/>
+            <a:ext cx="1298448" cy="310896"/>
+          </a:xfrm>
+          <a:prstGeom prst="triangle">
+            <a:avLst/>
+          </a:prstGeom>
+          <a:solidFill>
+            <a:srgbClr val="885060"/>
+          </a:solidFill>
+          <a:ln>
+            <a:noFill/>
+          </a:ln>
+          <a:effectLst/>
+        </p:spPr>
+        <p:txBody>
+          <a:bodyPr rtlCol="0" anchor="ctr"/>
+          <a:lstStyle/>
+          <a:p>
+            <a:pPr algn="ctr"/>
+          </a:p>
+        </p:txBody>
+      </p:sp>
+      <p:sp>
+        <p:nvSpPr>
+          <p:cNvPr id="13" name="Rectangle 12"/>
+          <p:cNvSpPr/>
+          <p:nvPr/>
+        </p:nvSpPr>
+        <p:spPr>
+          <a:xfrm>
+            <a:off x="6215616" y="1243584"/>
+            <a:ext cx="1188719" cy="749808"/>
+          </a:xfrm>
+          <a:prstGeom prst="rect">
+            <a:avLst/>
+          </a:prstGeom>
+          <a:solidFill>
+            <a:srgbClr val="F5EDF2"/>
+          </a:solidFill>
+          <a:ln w="15875">
+            <a:solidFill>
+              <a:srgbClr val="885060"/>
+            </a:solidFill>
+          </a:ln>
+          <a:effectLst/>
+        </p:spPr>
+        <p:txBody>
+          <a:bodyPr rtlCol="0" anchor="ctr" wrap="square" lIns="18288" rIns="18288" tIns="18288" bIns="18288">
+            <a:noAutofit/>
+          </a:bodyPr>
+          <a:lstStyle/>
+          <a:p>
+            <a:pPr algn="ctr">
+              <a:lnSpc>
+                <a:spcPct val="95000"/>
+              </a:lnSpc>
+              <a:spcAft>
+                <a:spcPts val="0"/>
+              </a:spcAft>
+            </a:pPr>
+            <a:r>
+              <a:rPr sz="850" b="1" i="0">
+                <a:solidFill>
+                  <a:srgbClr val="885060"/>
+                </a:solidFill>
+                <a:latin typeface="Outfit"/>
+              </a:rPr>
+              <a:t>Sols et Art</a:t>
+            </a:r>
+          </a:p>
+        </p:txBody>
+      </p:sp>
+      <p:sp>
+        <p:nvSpPr>
+          <p:cNvPr id="14" name="Isosceles Triangle 13"/>
+          <p:cNvSpPr/>
+          <p:nvPr/>
+        </p:nvSpPr>
+        <p:spPr>
+          <a:xfrm>
+            <a:off x="7588737" y="932688"/>
+            <a:ext cx="1298448" cy="310896"/>
+          </a:xfrm>
+          <a:prstGeom prst="triangle">
+            <a:avLst/>
+          </a:prstGeom>
+          <a:solidFill>
+            <a:srgbClr val="8C7166"/>
+          </a:solidFill>
+          <a:ln>
+            <a:noFill/>
+          </a:ln>
+          <a:effectLst/>
+        </p:spPr>
+        <p:txBody>
+          <a:bodyPr rtlCol="0" anchor="ctr"/>
+          <a:lstStyle/>
+          <a:p>
+            <a:pPr algn="ctr"/>
+          </a:p>
+        </p:txBody>
+      </p:sp>
+      <p:sp>
+        <p:nvSpPr>
+          <p:cNvPr id="15" name="Rectangle 14"/>
+          <p:cNvSpPr/>
+          <p:nvPr/>
+        </p:nvSpPr>
+        <p:spPr>
+          <a:xfrm>
+            <a:off x="7643601" y="1243584"/>
+            <a:ext cx="1188719" cy="749808"/>
+          </a:xfrm>
+          <a:prstGeom prst="rect">
+            <a:avLst/>
+          </a:prstGeom>
+          <a:solidFill>
+            <a:srgbClr val="F3EFEC"/>
+          </a:solidFill>
+          <a:ln w="15875">
+            <a:solidFill>
+              <a:srgbClr val="8C7166"/>
+            </a:solidFill>
+          </a:ln>
+          <a:effectLst/>
+        </p:spPr>
+        <p:txBody>
+          <a:bodyPr rtlCol="0" anchor="ctr" wrap="square" lIns="18288" rIns="18288" tIns="18288" bIns="18288">
+            <a:noAutofit/>
+          </a:bodyPr>
+          <a:lstStyle/>
+          <a:p>
+            <a:pPr algn="ctr">
+              <a:lnSpc>
+                <a:spcPct val="95000"/>
+              </a:lnSpc>
+              <a:spcAft>
+                <a:spcPts val="0"/>
+              </a:spcAft>
+            </a:pPr>
+            <a:r>
+              <a:rPr sz="850" b="1" i="0">
+                <a:solidFill>
+                  <a:srgbClr val="8C7166"/>
+                </a:solidFill>
+                <a:latin typeface="Outfit"/>
+              </a:rPr>
+              <a:t>AFES Communication</a:t>
+            </a:r>
+          </a:p>
+        </p:txBody>
+      </p:sp>
+      <p:sp>
+        <p:nvSpPr>
+          <p:cNvPr id="16" name="Isosceles Triangle 15"/>
+          <p:cNvSpPr/>
+          <p:nvPr/>
+        </p:nvSpPr>
+        <p:spPr>
+          <a:xfrm>
+            <a:off x="9016721" y="932688"/>
+            <a:ext cx="1298448" cy="310896"/>
+          </a:xfrm>
+          <a:prstGeom prst="triangle">
+            <a:avLst/>
+          </a:prstGeom>
+          <a:solidFill>
+            <a:srgbClr val="8C7166"/>
+          </a:solidFill>
+          <a:ln>
+            <a:noFill/>
+          </a:ln>
+          <a:effectLst/>
+        </p:spPr>
+        <p:txBody>
+          <a:bodyPr rtlCol="0" anchor="ctr"/>
+          <a:lstStyle/>
+          <a:p>
+            <a:pPr algn="ctr"/>
+          </a:p>
+        </p:txBody>
+      </p:sp>
+      <p:sp>
+        <p:nvSpPr>
+          <p:cNvPr id="17" name="Rectangle 16"/>
+          <p:cNvSpPr/>
+          <p:nvPr/>
+        </p:nvSpPr>
+        <p:spPr>
+          <a:xfrm>
+            <a:off x="9071585" y="1243584"/>
+            <a:ext cx="1188719" cy="749808"/>
+          </a:xfrm>
+          <a:prstGeom prst="rect">
+            <a:avLst/>
+          </a:prstGeom>
+          <a:solidFill>
+            <a:srgbClr val="F3EFEC"/>
+          </a:solidFill>
+          <a:ln w="15875">
+            <a:solidFill>
+              <a:srgbClr val="8C7166"/>
+            </a:solidFill>
+          </a:ln>
+          <a:effectLst/>
+        </p:spPr>
+        <p:txBody>
+          <a:bodyPr rtlCol="0" anchor="ctr" wrap="square" lIns="18288" rIns="18288" tIns="18288" bIns="18288">
+            <a:noAutofit/>
+          </a:bodyPr>
+          <a:lstStyle/>
+          <a:p>
+            <a:pPr algn="ctr">
+              <a:lnSpc>
+                <a:spcPct val="95000"/>
+              </a:lnSpc>
+              <a:spcAft>
+                <a:spcPts val="0"/>
+              </a:spcAft>
+            </a:pPr>
+            <a:r>
+              <a:rPr sz="850" b="1" i="0">
+                <a:solidFill>
+                  <a:srgbClr val="8C7166"/>
+                </a:solidFill>
+                <a:latin typeface="Outfit"/>
+              </a:rPr>
+              <a:t>AFES Administrateurs</a:t>
+            </a:r>
+          </a:p>
+        </p:txBody>
+      </p:sp>
+      <p:sp>
+        <p:nvSpPr>
+          <p:cNvPr id="18" name="Isosceles Triangle 17"/>
+          <p:cNvSpPr/>
+          <p:nvPr/>
+        </p:nvSpPr>
+        <p:spPr>
+          <a:xfrm>
+            <a:off x="10444705" y="932688"/>
+            <a:ext cx="1298448" cy="310896"/>
+          </a:xfrm>
+          <a:prstGeom prst="triangle">
+            <a:avLst/>
+          </a:prstGeom>
+          <a:solidFill>
+            <a:srgbClr val="586330"/>
+          </a:solidFill>
+          <a:ln>
+            <a:noFill/>
+          </a:ln>
+          <a:effectLst/>
+        </p:spPr>
+        <p:txBody>
+          <a:bodyPr rtlCol="0" anchor="ctr"/>
+          <a:lstStyle/>
+          <a:p>
+            <a:pPr algn="ctr"/>
+          </a:p>
+        </p:txBody>
+      </p:sp>
+      <p:sp>
+        <p:nvSpPr>
+          <p:cNvPr id="19" name="Rectangle 18"/>
+          <p:cNvSpPr/>
+          <p:nvPr/>
+        </p:nvSpPr>
+        <p:spPr>
+          <a:xfrm>
+            <a:off x="10499569" y="1243584"/>
+            <a:ext cx="1188719" cy="749808"/>
+          </a:xfrm>
+          <a:prstGeom prst="rect">
+            <a:avLst/>
+          </a:prstGeom>
+          <a:solidFill>
+            <a:srgbClr val="DBE9A9"/>
           </a:solidFill>
           <a:ln w="15875">
             <a:solidFill>
@@ -10058,27 +10378,27 @@
                 </a:solidFill>
                 <a:latin typeface="Outfit"/>
               </a:rPr>
-              <a:t>Secteur privé</a:t>
-            </a:r>
-          </a:p>
-        </p:txBody>
-      </p:sp>
-      <p:sp>
-        <p:nvSpPr>
-          <p:cNvPr id="12" name="Isosceles Triangle 11"/>
+              <a:t>Zones humides</a:t>
+            </a:r>
+          </a:p>
+        </p:txBody>
+      </p:sp>
+      <p:sp>
+        <p:nvSpPr>
+          <p:cNvPr id="20" name="Isosceles Triangle 19"/>
           <p:cNvSpPr/>
           <p:nvPr/>
         </p:nvSpPr>
         <p:spPr>
           <a:xfrm>
-            <a:off x="6160752" y="932688"/>
-            <a:ext cx="1298448" cy="310896"/>
+            <a:off x="502920" y="2331720"/>
+            <a:ext cx="1609344" cy="365760"/>
           </a:xfrm>
           <a:prstGeom prst="triangle">
             <a:avLst/>
           </a:prstGeom>
           <a:solidFill>
-            <a:srgbClr val="885060"/>
+            <a:srgbClr val="9C3F00"/>
           </a:solidFill>
           <a:ln>
             <a:noFill/>
@@ -10095,24 +10415,24 @@
       </p:sp>
       <p:sp>
         <p:nvSpPr>
-          <p:cNvPr id="13" name="Rectangle 12"/>
+          <p:cNvPr id="21" name="Rectangle 20"/>
           <p:cNvSpPr/>
           <p:nvPr/>
         </p:nvSpPr>
         <p:spPr>
           <a:xfrm>
-            <a:off x="6215616" y="1243584"/>
-            <a:ext cx="1188719" cy="749808"/>
-          </a:xfrm>
-          <a:prstGeom prst="rect">
-            <a:avLst/>
-          </a:prstGeom>
-          <a:solidFill>
-            <a:srgbClr val="F5EDF2"/>
+            <a:off x="557784" y="2697479"/>
+            <a:ext cx="1499616" cy="932688"/>
+          </a:xfrm>
+          <a:prstGeom prst="rect">
+            <a:avLst/>
+          </a:prstGeom>
+          <a:solidFill>
+            <a:srgbClr val="FFDBCC"/>
           </a:solidFill>
           <a:ln w="15875">
             <a:solidFill>
-              <a:srgbClr val="885060"/>
+              <a:srgbClr val="9C3F00"/>
             </a:solidFill>
           </a:ln>
           <a:effectLst/>
@@ -10132,33 +10452,33 @@
               </a:spcAft>
             </a:pPr>
             <a:r>
-              <a:rPr sz="850" b="1" i="0">
-                <a:solidFill>
-                  <a:srgbClr val="885060"/>
+              <a:rPr sz="950" b="1" i="0">
+                <a:solidFill>
+                  <a:srgbClr val="9C3F00"/>
                 </a:solidFill>
                 <a:latin typeface="Outfit"/>
               </a:rPr>
-              <a:t>Sols et Art</a:t>
-            </a:r>
-          </a:p>
-        </p:txBody>
-      </p:sp>
-      <p:sp>
-        <p:nvSpPr>
-          <p:cNvPr id="14" name="Isosceles Triangle 13"/>
+              <a:t>Fresque du Sol</a:t>
+            </a:r>
+          </a:p>
+        </p:txBody>
+      </p:sp>
+      <p:sp>
+        <p:nvSpPr>
+          <p:cNvPr id="22" name="Isosceles Triangle 21"/>
           <p:cNvSpPr/>
           <p:nvPr/>
         </p:nvSpPr>
         <p:spPr>
           <a:xfrm>
-            <a:off x="7588737" y="932688"/>
-            <a:ext cx="1298448" cy="310896"/>
+            <a:off x="2240280" y="2331720"/>
+            <a:ext cx="1609344" cy="365760"/>
           </a:xfrm>
           <a:prstGeom prst="triangle">
             <a:avLst/>
           </a:prstGeom>
           <a:solidFill>
-            <a:srgbClr val="8C7166"/>
+            <a:srgbClr val="586330"/>
           </a:solidFill>
           <a:ln>
             <a:noFill/>
@@ -10175,174 +10495,14 @@
       </p:sp>
       <p:sp>
         <p:nvSpPr>
-          <p:cNvPr id="15" name="Rectangle 14"/>
+          <p:cNvPr id="23" name="Rectangle 22"/>
           <p:cNvSpPr/>
           <p:nvPr/>
         </p:nvSpPr>
         <p:spPr>
           <a:xfrm>
-            <a:off x="7643601" y="1243584"/>
-            <a:ext cx="1188719" cy="749808"/>
-          </a:xfrm>
-          <a:prstGeom prst="rect">
-            <a:avLst/>
-          </a:prstGeom>
-          <a:solidFill>
-            <a:srgbClr val="F3EFEC"/>
-          </a:solidFill>
-          <a:ln w="15875">
-            <a:solidFill>
-              <a:srgbClr val="8C7166"/>
-            </a:solidFill>
-          </a:ln>
-          <a:effectLst/>
-        </p:spPr>
-        <p:txBody>
-          <a:bodyPr rtlCol="0" anchor="ctr" wrap="square" lIns="18288" rIns="18288" tIns="18288" bIns="18288">
-            <a:noAutofit/>
-          </a:bodyPr>
-          <a:lstStyle/>
-          <a:p>
-            <a:pPr algn="ctr">
-              <a:lnSpc>
-                <a:spcPct val="95000"/>
-              </a:lnSpc>
-              <a:spcAft>
-                <a:spcPts val="0"/>
-              </a:spcAft>
-            </a:pPr>
-            <a:r>
-              <a:rPr sz="850" b="1" i="0">
-                <a:solidFill>
-                  <a:srgbClr val="8C7166"/>
-                </a:solidFill>
-                <a:latin typeface="Outfit"/>
-              </a:rPr>
-              <a:t>AFES Communication</a:t>
-            </a:r>
-          </a:p>
-        </p:txBody>
-      </p:sp>
-      <p:sp>
-        <p:nvSpPr>
-          <p:cNvPr id="16" name="Isosceles Triangle 15"/>
-          <p:cNvSpPr/>
-          <p:nvPr/>
-        </p:nvSpPr>
-        <p:spPr>
-          <a:xfrm>
-            <a:off x="9016721" y="932688"/>
-            <a:ext cx="1298448" cy="310896"/>
-          </a:xfrm>
-          <a:prstGeom prst="triangle">
-            <a:avLst/>
-          </a:prstGeom>
-          <a:solidFill>
-            <a:srgbClr val="8C7166"/>
-          </a:solidFill>
-          <a:ln>
-            <a:noFill/>
-          </a:ln>
-          <a:effectLst/>
-        </p:spPr>
-        <p:txBody>
-          <a:bodyPr rtlCol="0" anchor="ctr"/>
-          <a:lstStyle/>
-          <a:p>
-            <a:pPr algn="ctr"/>
-          </a:p>
-        </p:txBody>
-      </p:sp>
-      <p:sp>
-        <p:nvSpPr>
-          <p:cNvPr id="17" name="Rectangle 16"/>
-          <p:cNvSpPr/>
-          <p:nvPr/>
-        </p:nvSpPr>
-        <p:spPr>
-          <a:xfrm>
-            <a:off x="9071585" y="1243584"/>
-            <a:ext cx="1188719" cy="749808"/>
-          </a:xfrm>
-          <a:prstGeom prst="rect">
-            <a:avLst/>
-          </a:prstGeom>
-          <a:solidFill>
-            <a:srgbClr val="F3EFEC"/>
-          </a:solidFill>
-          <a:ln w="15875">
-            <a:solidFill>
-              <a:srgbClr val="8C7166"/>
-            </a:solidFill>
-          </a:ln>
-          <a:effectLst/>
-        </p:spPr>
-        <p:txBody>
-          <a:bodyPr rtlCol="0" anchor="ctr" wrap="square" lIns="18288" rIns="18288" tIns="18288" bIns="18288">
-            <a:noAutofit/>
-          </a:bodyPr>
-          <a:lstStyle/>
-          <a:p>
-            <a:pPr algn="ctr">
-              <a:lnSpc>
-                <a:spcPct val="95000"/>
-              </a:lnSpc>
-              <a:spcAft>
-                <a:spcPts val="0"/>
-              </a:spcAft>
-            </a:pPr>
-            <a:r>
-              <a:rPr sz="850" b="1" i="0">
-                <a:solidFill>
-                  <a:srgbClr val="8C7166"/>
-                </a:solidFill>
-                <a:latin typeface="Outfit"/>
-              </a:rPr>
-              <a:t>AFES Administrateurs</a:t>
-            </a:r>
-          </a:p>
-        </p:txBody>
-      </p:sp>
-      <p:sp>
-        <p:nvSpPr>
-          <p:cNvPr id="18" name="Isosceles Triangle 17"/>
-          <p:cNvSpPr/>
-          <p:nvPr/>
-        </p:nvSpPr>
-        <p:spPr>
-          <a:xfrm>
-            <a:off x="10444705" y="932688"/>
-            <a:ext cx="1298448" cy="310896"/>
-          </a:xfrm>
-          <a:prstGeom prst="triangle">
-            <a:avLst/>
-          </a:prstGeom>
-          <a:solidFill>
-            <a:srgbClr val="586330"/>
-          </a:solidFill>
-          <a:ln>
-            <a:noFill/>
-          </a:ln>
-          <a:effectLst/>
-        </p:spPr>
-        <p:txBody>
-          <a:bodyPr rtlCol="0" anchor="ctr"/>
-          <a:lstStyle/>
-          <a:p>
-            <a:pPr algn="ctr"/>
-          </a:p>
-        </p:txBody>
-      </p:sp>
-      <p:sp>
-        <p:nvSpPr>
-          <p:cNvPr id="19" name="Rectangle 18"/>
-          <p:cNvSpPr/>
-          <p:nvPr/>
-        </p:nvSpPr>
-        <p:spPr>
-          <a:xfrm>
-            <a:off x="10499569" y="1243584"/>
-            <a:ext cx="1188719" cy="749808"/>
+            <a:off x="2295144" y="2697479"/>
+            <a:ext cx="1499616" cy="932688"/>
           </a:xfrm>
           <a:prstGeom prst="rect">
             <a:avLst/>
@@ -10372,33 +10532,33 @@
               </a:spcAft>
             </a:pPr>
             <a:r>
-              <a:rPr sz="850" b="1" i="0">
+              <a:rPr sz="950" b="1" i="0">
                 <a:solidFill>
                   <a:srgbClr val="586330"/>
                 </a:solidFill>
                 <a:latin typeface="Outfit"/>
               </a:rPr>
-              <a:t>Zones humides</a:t>
-            </a:r>
-          </a:p>
-        </p:txBody>
-      </p:sp>
-      <p:sp>
-        <p:nvSpPr>
-          <p:cNvPr id="20" name="Isosceles Triangle 19"/>
+              <a:t>Sols Forestiers</a:t>
+            </a:r>
+          </a:p>
+        </p:txBody>
+      </p:sp>
+      <p:sp>
+        <p:nvSpPr>
+          <p:cNvPr id="24" name="Isosceles Triangle 23"/>
           <p:cNvSpPr/>
           <p:nvPr/>
         </p:nvSpPr>
         <p:spPr>
           <a:xfrm>
-            <a:off x="502920" y="2331720"/>
+            <a:off x="8366760" y="2331720"/>
             <a:ext cx="1609344" cy="365760"/>
           </a:xfrm>
           <a:prstGeom prst="triangle">
             <a:avLst/>
           </a:prstGeom>
           <a:solidFill>
-            <a:srgbClr val="9C3F00"/>
+            <a:srgbClr val="586330"/>
           </a:solidFill>
           <a:ln>
             <a:noFill/>
@@ -10415,93 +10575,13 @@
       </p:sp>
       <p:sp>
         <p:nvSpPr>
-          <p:cNvPr id="21" name="Rectangle 20"/>
+          <p:cNvPr id="25" name="Rectangle 24"/>
           <p:cNvSpPr/>
           <p:nvPr/>
         </p:nvSpPr>
         <p:spPr>
           <a:xfrm>
-            <a:off x="557784" y="2697479"/>
-            <a:ext cx="1499616" cy="932688"/>
-          </a:xfrm>
-          <a:prstGeom prst="rect">
-            <a:avLst/>
-          </a:prstGeom>
-          <a:solidFill>
-            <a:srgbClr val="FFDBCC"/>
-          </a:solidFill>
-          <a:ln w="15875">
-            <a:solidFill>
-              <a:srgbClr val="9C3F00"/>
-            </a:solidFill>
-          </a:ln>
-          <a:effectLst/>
-        </p:spPr>
-        <p:txBody>
-          <a:bodyPr rtlCol="0" anchor="ctr" wrap="square" lIns="18288" rIns="18288" tIns="18288" bIns="18288">
-            <a:noAutofit/>
-          </a:bodyPr>
-          <a:lstStyle/>
-          <a:p>
-            <a:pPr algn="ctr">
-              <a:lnSpc>
-                <a:spcPct val="95000"/>
-              </a:lnSpc>
-              <a:spcAft>
-                <a:spcPts val="0"/>
-              </a:spcAft>
-            </a:pPr>
-            <a:r>
-              <a:rPr sz="950" b="1" i="0">
-                <a:solidFill>
-                  <a:srgbClr val="9C3F00"/>
-                </a:solidFill>
-                <a:latin typeface="Outfit"/>
-              </a:rPr>
-              <a:t>Fresque du Sol</a:t>
-            </a:r>
-          </a:p>
-        </p:txBody>
-      </p:sp>
-      <p:sp>
-        <p:nvSpPr>
-          <p:cNvPr id="22" name="Isosceles Triangle 21"/>
-          <p:cNvSpPr/>
-          <p:nvPr/>
-        </p:nvSpPr>
-        <p:spPr>
-          <a:xfrm>
-            <a:off x="2240280" y="2331720"/>
-            <a:ext cx="1609344" cy="365760"/>
-          </a:xfrm>
-          <a:prstGeom prst="triangle">
-            <a:avLst/>
-          </a:prstGeom>
-          <a:solidFill>
-            <a:srgbClr val="586330"/>
-          </a:solidFill>
-          <a:ln>
-            <a:noFill/>
-          </a:ln>
-          <a:effectLst/>
-        </p:spPr>
-        <p:txBody>
-          <a:bodyPr rtlCol="0" anchor="ctr"/>
-          <a:lstStyle/>
-          <a:p>
-            <a:pPr algn="ctr"/>
-          </a:p>
-        </p:txBody>
-      </p:sp>
-      <p:sp>
-        <p:nvSpPr>
-          <p:cNvPr id="23" name="Rectangle 22"/>
-          <p:cNvSpPr/>
-          <p:nvPr/>
-        </p:nvSpPr>
-        <p:spPr>
-          <a:xfrm>
-            <a:off x="2295144" y="2697479"/>
+            <a:off x="8421624" y="2697479"/>
             <a:ext cx="1499616" cy="932688"/>
           </a:xfrm>
           <a:prstGeom prst="rect">
@@ -10538,86 +10618,6 @@
                 </a:solidFill>
                 <a:latin typeface="Outfit"/>
               </a:rPr>
-              <a:t>Sols Forestiers</a:t>
-            </a:r>
-          </a:p>
-        </p:txBody>
-      </p:sp>
-      <p:sp>
-        <p:nvSpPr>
-          <p:cNvPr id="24" name="Isosceles Triangle 23"/>
-          <p:cNvSpPr/>
-          <p:nvPr/>
-        </p:nvSpPr>
-        <p:spPr>
-          <a:xfrm>
-            <a:off x="8366760" y="2331720"/>
-            <a:ext cx="1609344" cy="365760"/>
-          </a:xfrm>
-          <a:prstGeom prst="triangle">
-            <a:avLst/>
-          </a:prstGeom>
-          <a:solidFill>
-            <a:srgbClr val="586330"/>
-          </a:solidFill>
-          <a:ln>
-            <a:noFill/>
-          </a:ln>
-          <a:effectLst/>
-        </p:spPr>
-        <p:txBody>
-          <a:bodyPr rtlCol="0" anchor="ctr"/>
-          <a:lstStyle/>
-          <a:p>
-            <a:pPr algn="ctr"/>
-          </a:p>
-        </p:txBody>
-      </p:sp>
-      <p:sp>
-        <p:nvSpPr>
-          <p:cNvPr id="25" name="Rectangle 24"/>
-          <p:cNvSpPr/>
-          <p:nvPr/>
-        </p:nvSpPr>
-        <p:spPr>
-          <a:xfrm>
-            <a:off x="8421624" y="2697479"/>
-            <a:ext cx="1499616" cy="932688"/>
-          </a:xfrm>
-          <a:prstGeom prst="rect">
-            <a:avLst/>
-          </a:prstGeom>
-          <a:solidFill>
-            <a:srgbClr val="DBE9A9"/>
-          </a:solidFill>
-          <a:ln w="15875">
-            <a:solidFill>
-              <a:srgbClr val="586330"/>
-            </a:solidFill>
-          </a:ln>
-          <a:effectLst/>
-        </p:spPr>
-        <p:txBody>
-          <a:bodyPr rtlCol="0" anchor="ctr" wrap="square" lIns="18288" rIns="18288" tIns="18288" bIns="18288">
-            <a:noAutofit/>
-          </a:bodyPr>
-          <a:lstStyle/>
-          <a:p>
-            <a:pPr algn="ctr">
-              <a:lnSpc>
-                <a:spcPct val="95000"/>
-              </a:lnSpc>
-              <a:spcAft>
-                <a:spcPts val="0"/>
-              </a:spcAft>
-            </a:pPr>
-            <a:r>
-              <a:rPr sz="950" b="1" i="0">
-                <a:solidFill>
-                  <a:srgbClr val="586330"/>
-                </a:solidFill>
-                <a:latin typeface="Outfit"/>
-              </a:rPr>
               <a:t>SRP Sols</a:t>
             </a:r>
           </a:p>
@@ -11421,11 +11421,11 @@
             <a:avLst/>
           </a:prstGeom>
           <a:solidFill>
-            <a:srgbClr val="D8E6A6"/>
+            <a:srgbClr val="C9E2E4"/>
           </a:solidFill>
           <a:ln w="19050">
             <a:solidFill>
-              <a:srgbClr val="586330"/>
+              <a:srgbClr val="264E54"/>
             </a:solidFill>
           </a:ln>
           <a:effectLst/>
@@ -13439,11 +13439,11 @@
             <a:avLst/>
           </a:prstGeom>
           <a:solidFill>
-            <a:srgbClr val="D8E6A6"/>
+            <a:srgbClr val="C9E2E4"/>
           </a:solidFill>
           <a:ln w="22225">
             <a:solidFill>
-              <a:srgbClr val="586330"/>
+              <a:srgbClr val="264E54"/>
             </a:solidFill>
           </a:ln>
           <a:effectLst/>
@@ -13531,7 +13531,7 @@
                 </a:solidFill>
                 <a:latin typeface="Inter"/>
               </a:rPr>
-              <a:t>#586330 sur #d8e6a6</a:t>
+              <a:t>#264e54 sur #c9e2e4</a:t>
             </a:r>
           </a:p>
         </p:txBody>
